--- a/deliverables/demo-deck.pptx
+++ b/deliverables/demo-deck.pptx
@@ -1861,7 +1861,7 @@
       </p:sp>
       <p:pic>
         <p:nvPicPr>
-          <p:cNvPr id="7" name="Image 0" descr="C:/Users/aksuc/Desktop/proje_odev/design/export/screens/01-promise-light.png">    </p:cNvPr>
+          <p:cNvPr id="7" name="Image 0" descr="C:\Users\aksuc\Desktop\proje_odev\design\export/screens/01-promise-light.png">    </p:cNvPr>
           <p:cNvPicPr>
             <a:picLocks noChangeAspect="1"/>
           </p:cNvPicPr>
@@ -1912,7 +1912,7 @@
       </p:sp>
       <p:pic>
         <p:nvPicPr>
-          <p:cNvPr id="9" name="Image 1" descr="C:/Users/aksuc/Desktop/proje_odev/design/export/screens/07-reveal-light.png">    </p:cNvPr>
+          <p:cNvPr id="9" name="Image 1" descr="C:\Users\aksuc\Desktop\proje_odev\design\export/screens/07-reveal-light.png">    </p:cNvPr>
           <p:cNvPicPr>
             <a:picLocks noChangeAspect="1"/>
           </p:cNvPicPr>
@@ -2206,7 +2206,7 @@
       </p:sp>
       <p:pic>
         <p:nvPicPr>
-          <p:cNvPr id="6" name="Image 0" descr="C:/Users/aksuc/Desktop/proje_odev/design/export/screens/13-home-light.png">    </p:cNvPr>
+          <p:cNvPr id="6" name="Image 0" descr="C:\Users\aksuc\Desktop\proje_odev\design\export/screens/13-home-light.png">    </p:cNvPr>
           <p:cNvPicPr>
             <a:picLocks noChangeAspect="1"/>
           </p:cNvPicPr>
@@ -2257,7 +2257,7 @@
       </p:sp>
       <p:pic>
         <p:nvPicPr>
-          <p:cNvPr id="8" name="Image 1" descr="C:/Users/aksuc/Desktop/proje_odev/design/export/screens/11-paywall-light.png">    </p:cNvPr>
+          <p:cNvPr id="8" name="Image 1" descr="C:\Users\aksuc\Desktop\proje_odev\design\export/screens/11-paywall-light.png">    </p:cNvPr>
           <p:cNvPicPr>
             <a:picLocks noChangeAspect="1"/>
           </p:cNvPicPr>
@@ -3508,7 +3508,7 @@
       </p:sp>
       <p:pic>
         <p:nvPicPr>
-          <p:cNvPr id="15" name="Image 0" descr="C:/Users/aksuc/Desktop/proje_odev/design/export/screens/01-promise-light.png">    </p:cNvPr>
+          <p:cNvPr id="15" name="Image 0" descr="C:\Users\aksuc\Desktop\proje_odev\design\export/screens/01-promise-light.png">    </p:cNvPr>
           <p:cNvPicPr>
             <a:picLocks noChangeAspect="1"/>
           </p:cNvPicPr>
@@ -4101,7 +4101,7 @@
       </p:sp>
       <p:pic>
         <p:nvPicPr>
-          <p:cNvPr id="17" name="Image 0" descr="C:/Users/aksuc/AppData/Local/Temp/claude/C--Users-aksuc-Desktop-proje-odev/778ab7f7-ea63-40ac-9532-5fd9330f50b7/scratchpad/img/style_crop.png">    </p:cNvPr>
+          <p:cNvPr id="17" name="Image 0" descr="C:\Users\aksuc\Desktop\proje_odev\design\tools\deliverables\deck\img/style_crop.png">    </p:cNvPr>
           <p:cNvPicPr>
             <a:picLocks noChangeAspect="1"/>
           </p:cNvPicPr>
@@ -4195,7 +4195,7 @@
       </p:sp>
       <p:pic>
         <p:nvPicPr>
-          <p:cNvPr id="3" name="Image 0" descr="C:/Users/aksuc/AppData/Local/Temp/claude/C--Users-aksuc-Desktop-proje-odev/778ab7f7-ea63-40ac-9532-5fd9330f50b7/scratchpad/img/board.png">    </p:cNvPr>
+          <p:cNvPr id="3" name="Image 0" descr="C:\Users\aksuc\Desktop\proje_odev\design\export/board-ours.png">    </p:cNvPr>
           <p:cNvPicPr>
             <a:picLocks noChangeAspect="1"/>
           </p:cNvPicPr>
@@ -6087,7 +6087,7 @@
       </p:sp>
       <p:pic>
         <p:nvPicPr>
-          <p:cNvPr id="16" name="Image 0" descr="C:/Users/aksuc/Desktop/proje_odev/design/export/screens/05-parents-light.png">    </p:cNvPr>
+          <p:cNvPr id="16" name="Image 0" descr="C:\Users\aksuc\Desktop\proje_odev\design\export/screens/05-parents-light.png">    </p:cNvPr>
           <p:cNvPicPr>
             <a:picLocks noChangeAspect="1"/>
           </p:cNvPicPr>
@@ -6177,7 +6177,7 @@
       </p:sp>
       <p:pic>
         <p:nvPicPr>
-          <p:cNvPr id="19" name="Image 1" descr="C:/Users/aksuc/Desktop/proje_odev/design/export/screens/07-reveal-light.png">    </p:cNvPr>
+          <p:cNvPr id="19" name="Image 1" descr="C:\Users\aksuc\Desktop\proje_odev\design\export/screens/07-reveal-light.png">    </p:cNvPr>
           <p:cNvPicPr>
             <a:picLocks noChangeAspect="1"/>
           </p:cNvPicPr>
@@ -6267,7 +6267,7 @@
       </p:sp>
       <p:pic>
         <p:nvPicPr>
-          <p:cNvPr id="22" name="Image 2" descr="C:/Users/aksuc/Desktop/proje_odev/design/export/screens/09-plan-light.png">    </p:cNvPr>
+          <p:cNvPr id="22" name="Image 2" descr="C:\Users\aksuc\Desktop\proje_odev\design\export/screens/09-plan-light.png">    </p:cNvPr>
           <p:cNvPicPr>
             <a:picLocks noChangeAspect="1"/>
           </p:cNvPicPr>
@@ -6467,7 +6467,7 @@
       </p:sp>
       <p:pic>
         <p:nvPicPr>
-          <p:cNvPr id="4" name="Image 0" descr="C:/Users/aksuc/Desktop/proje_odev/design/export/screens/11-paywall-light.png">    </p:cNvPr>
+          <p:cNvPr id="4" name="Image 0" descr="C:\Users\aksuc\Desktop\proje_odev\design\export/screens/11-paywall-light.png">    </p:cNvPr>
           <p:cNvPicPr>
             <a:picLocks noChangeAspect="1"/>
           </p:cNvPicPr>

--- a/deliverables/demo-deck.pptx
+++ b/deliverables/demo-deck.pptx
@@ -1303,7 +1303,7 @@
           <a:p>
             <a:r>
               <a:rPr lang="en-US" dirty="0"/>
-              <a:t>Here is the side-by-side. Questions to result: 31 for GoTall against 4 for us, and our result is shown before the paywall, theirs is not. Seconds, taps and the clarity score are our own measurements from testing both apps with classmates: read the numbers out from the table. Our internal QA audit also found no dead ends in the flow.</a:t>
+              <a:t>Here is the side-by-side. GoTall shows 33 screens before its paywall and the result is still locked; we show the result on screen 7 after 4 questions, free. Screen and tap counts for GoTall come from ScreensDesign's public recording of its onboarding. Seconds, taps and the clarity score are our own measurements from testing both apps with classmates: read the numbers out from the table. Our internal QA audit also found no dead ends in the flow.</a:t>
             </a:r>
             <a:endParaRPr lang="en-US" dirty="0"/>
           </a:p>
@@ -2461,7 +2461,7 @@
                 <a:ea typeface="Arial" pitchFamily="34" charset="-122"/>
                 <a:cs typeface="Arial" pitchFamily="34" charset="-120"/>
               </a:rPr>
-              <a:t>A height predictor app. 31-step quiz, then a paywall, then the result.</a:t>
+              <a:t>A height predictor app. 33 screens of questions and claims, then a paywall. The result stays locked.</a:t>
             </a:r>
             <a:endParaRPr lang="en-US" sz="1600" dirty="0"/>
           </a:p>
@@ -7196,7 +7196,7 @@
                 <a:ea typeface="Arial" pitchFamily="34" charset="-122"/>
                 <a:cs typeface="Arial" pitchFamily="34" charset="-120"/>
               </a:rPr>
-              <a:t>3-minute countdown timer</a:t>
+              <a:t>"Special offer" countdown (2:59:59)</a:t>
             </a:r>
             <a:endParaRPr lang="en-US" sz="1600" dirty="0"/>
           </a:p>
@@ -7342,7 +7342,7 @@
                 <a:gridCol w="2011680"/>
                 <a:gridCol w="2194560"/>
               </a:tblGrid>
-              <a:tr h="685800">
+              <a:tr h="621792">
                 <a:tc>
                   <a:txBody>
                     <a:bodyPr/>
@@ -7548,7 +7548,7 @@
                   </a:tcPr>
                 </a:tc>
               </a:tr>
-              <a:tr h="685800">
+              <a:tr h="621792">
                 <a:tc>
                   <a:txBody>
                     <a:bodyPr/>
@@ -7566,7 +7566,7 @@
                           <a:ea typeface="Arial" pitchFamily="34" charset="-122"/>
                           <a:cs typeface="Arial" pitchFamily="34" charset="-120"/>
                         </a:rPr>
-                        <a:t>Questions to result</a:t>
+                        <a:t>Screens before the paywall</a:t>
                       </a:r>
                       <a:endParaRPr lang="en-US" sz="2000" dirty="0">
                         <a:latin typeface="Arial" charset="0"/>
@@ -7634,7 +7634,213 @@
                           <a:ea typeface="Arial" pitchFamily="34" charset="-122"/>
                           <a:cs typeface="Arial" pitchFamily="34" charset="-120"/>
                         </a:rPr>
-                        <a:t>31</a:t>
+                        <a:t>33</a:t>
+                      </a:r>
+                      <a:endParaRPr lang="en-US" sz="2000" dirty="0">
+                        <a:latin typeface="Arial" charset="0"/>
+                        <a:ea typeface="Arial" charset="0"/>
+                        <a:cs typeface="Arial" charset="0"/>
+                      </a:endParaRPr>
+                    </a:p>
+                  </a:txBody>
+                  <a:tcPr marL="137160" marR="137160" marT="0" marB="0" anchor="ctr">
+                    <a:lnL w="12700" cap="flat" cmpd="sng" algn="ctr">
+                      <a:solidFill>
+                        <a:srgbClr val="E3E0D8"/>
+                      </a:solidFill>
+                      <a:prstDash val="solid"/>
+                      <a:round/>
+                      <a:headEnd type="none" w="med" len="med"/>
+                      <a:tailEnd type="none" w="med" len="med"/>
+                    </a:lnL>
+                    <a:lnR w="12700" cap="flat" cmpd="sng" algn="ctr">
+                      <a:solidFill>
+                        <a:srgbClr val="E3E0D8"/>
+                      </a:solidFill>
+                      <a:prstDash val="solid"/>
+                      <a:round/>
+                      <a:headEnd type="none" w="med" len="med"/>
+                      <a:tailEnd type="none" w="med" len="med"/>
+                    </a:lnR>
+                    <a:lnT w="12700" cap="flat" cmpd="sng" algn="ctr">
+                      <a:solidFill>
+                        <a:srgbClr val="E3E0D8"/>
+                      </a:solidFill>
+                      <a:prstDash val="solid"/>
+                      <a:round/>
+                      <a:headEnd type="none" w="med" len="med"/>
+                      <a:tailEnd type="none" w="med" len="med"/>
+                    </a:lnT>
+                    <a:lnB w="12700" cap="flat" cmpd="sng" algn="ctr">
+                      <a:solidFill>
+                        <a:srgbClr val="E3E0D8"/>
+                      </a:solidFill>
+                      <a:prstDash val="solid"/>
+                      <a:round/>
+                      <a:headEnd type="none" w="med" len="med"/>
+                      <a:tailEnd type="none" w="med" len="med"/>
+                    </a:lnB>
+                    <a:solidFill>
+                      <a:srgbClr val="FFFFFF"/>
+                    </a:solidFill>
+                  </a:tcPr>
+                </a:tc>
+                <a:tc>
+                  <a:txBody>
+                    <a:bodyPr/>
+                    <a:lstStyle/>
+                    <a:p>
+                      <a:pPr indent="0" marL="0">
+                        <a:buNone/>
+                      </a:pPr>
+                      <a:r>
+                        <a:rPr lang="en-US" sz="2000" b="1" dirty="0">
+                          <a:solidFill>
+                            <a:srgbClr val="141414"/>
+                          </a:solidFill>
+                          <a:latin typeface="Arial" pitchFamily="34" charset="0"/>
+                          <a:ea typeface="Arial" pitchFamily="34" charset="-122"/>
+                          <a:cs typeface="Arial" pitchFamily="34" charset="-120"/>
+                        </a:rPr>
+                        <a:t>11</a:t>
+                      </a:r>
+                      <a:endParaRPr lang="en-US" sz="2000" dirty="0">
+                        <a:latin typeface="Arial" charset="0"/>
+                        <a:ea typeface="Arial" charset="0"/>
+                        <a:cs typeface="Arial" charset="0"/>
+                      </a:endParaRPr>
+                    </a:p>
+                  </a:txBody>
+                  <a:tcPr marL="137160" marR="137160" marT="0" marB="0" anchor="ctr">
+                    <a:lnL w="12700" cap="flat" cmpd="sng" algn="ctr">
+                      <a:solidFill>
+                        <a:srgbClr val="E3E0D8"/>
+                      </a:solidFill>
+                      <a:prstDash val="solid"/>
+                      <a:round/>
+                      <a:headEnd type="none" w="med" len="med"/>
+                      <a:tailEnd type="none" w="med" len="med"/>
+                    </a:lnL>
+                    <a:lnR w="12700" cap="flat" cmpd="sng" algn="ctr">
+                      <a:solidFill>
+                        <a:srgbClr val="E3E0D8"/>
+                      </a:solidFill>
+                      <a:prstDash val="solid"/>
+                      <a:round/>
+                      <a:headEnd type="none" w="med" len="med"/>
+                      <a:tailEnd type="none" w="med" len="med"/>
+                    </a:lnR>
+                    <a:lnT w="12700" cap="flat" cmpd="sng" algn="ctr">
+                      <a:solidFill>
+                        <a:srgbClr val="E3E0D8"/>
+                      </a:solidFill>
+                      <a:prstDash val="solid"/>
+                      <a:round/>
+                      <a:headEnd type="none" w="med" len="med"/>
+                      <a:tailEnd type="none" w="med" len="med"/>
+                    </a:lnT>
+                    <a:lnB w="12700" cap="flat" cmpd="sng" algn="ctr">
+                      <a:solidFill>
+                        <a:srgbClr val="E3E0D8"/>
+                      </a:solidFill>
+                      <a:prstDash val="solid"/>
+                      <a:round/>
+                      <a:headEnd type="none" w="med" len="med"/>
+                      <a:tailEnd type="none" w="med" len="med"/>
+                    </a:lnB>
+                    <a:solidFill>
+                      <a:srgbClr val="EAF8C2"/>
+                    </a:solidFill>
+                  </a:tcPr>
+                </a:tc>
+              </a:tr>
+              <a:tr h="621792">
+                <a:tc>
+                  <a:txBody>
+                    <a:bodyPr/>
+                    <a:lstStyle/>
+                    <a:p>
+                      <a:pPr indent="0" marL="0">
+                        <a:buNone/>
+                      </a:pPr>
+                      <a:r>
+                        <a:rPr lang="en-US" sz="2000" dirty="0">
+                          <a:solidFill>
+                            <a:srgbClr val="141414"/>
+                          </a:solidFill>
+                          <a:latin typeface="Arial" pitchFamily="34" charset="0"/>
+                          <a:ea typeface="Arial" pitchFamily="34" charset="-122"/>
+                          <a:cs typeface="Arial" pitchFamily="34" charset="-120"/>
+                        </a:rPr>
+                        <a:t>Questions before the result</a:t>
+                      </a:r>
+                      <a:endParaRPr lang="en-US" sz="2000" dirty="0">
+                        <a:latin typeface="Arial" charset="0"/>
+                        <a:ea typeface="Arial" charset="0"/>
+                        <a:cs typeface="Arial" charset="0"/>
+                      </a:endParaRPr>
+                    </a:p>
+                  </a:txBody>
+                  <a:tcPr marL="137160" marR="137160" marT="0" marB="0" anchor="ctr">
+                    <a:lnL w="12700" cap="flat" cmpd="sng" algn="ctr">
+                      <a:solidFill>
+                        <a:srgbClr val="E3E0D8"/>
+                      </a:solidFill>
+                      <a:prstDash val="solid"/>
+                      <a:round/>
+                      <a:headEnd type="none" w="med" len="med"/>
+                      <a:tailEnd type="none" w="med" len="med"/>
+                    </a:lnL>
+                    <a:lnR w="12700" cap="flat" cmpd="sng" algn="ctr">
+                      <a:solidFill>
+                        <a:srgbClr val="E3E0D8"/>
+                      </a:solidFill>
+                      <a:prstDash val="solid"/>
+                      <a:round/>
+                      <a:headEnd type="none" w="med" len="med"/>
+                      <a:tailEnd type="none" w="med" len="med"/>
+                    </a:lnR>
+                    <a:lnT w="12700" cap="flat" cmpd="sng" algn="ctr">
+                      <a:solidFill>
+                        <a:srgbClr val="E3E0D8"/>
+                      </a:solidFill>
+                      <a:prstDash val="solid"/>
+                      <a:round/>
+                      <a:headEnd type="none" w="med" len="med"/>
+                      <a:tailEnd type="none" w="med" len="med"/>
+                    </a:lnT>
+                    <a:lnB w="12700" cap="flat" cmpd="sng" algn="ctr">
+                      <a:solidFill>
+                        <a:srgbClr val="E3E0D8"/>
+                      </a:solidFill>
+                      <a:prstDash val="solid"/>
+                      <a:round/>
+                      <a:headEnd type="none" w="med" len="med"/>
+                      <a:tailEnd type="none" w="med" len="med"/>
+                    </a:lnB>
+                    <a:solidFill>
+                      <a:srgbClr val="FFFFFF"/>
+                    </a:solidFill>
+                  </a:tcPr>
+                </a:tc>
+                <a:tc>
+                  <a:txBody>
+                    <a:bodyPr/>
+                    <a:lstStyle/>
+                    <a:p>
+                      <a:pPr indent="0" marL="0">
+                        <a:buNone/>
+                      </a:pPr>
+                      <a:r>
+                        <a:rPr lang="en-US" sz="2000" b="1" dirty="0">
+                          <a:solidFill>
+                            <a:srgbClr val="141414"/>
+                          </a:solidFill>
+                          <a:latin typeface="Arial" pitchFamily="34" charset="0"/>
+                          <a:ea typeface="Arial" pitchFamily="34" charset="-122"/>
+                          <a:cs typeface="Arial" pitchFamily="34" charset="-120"/>
+                        </a:rPr>
+                        <a:t>25+ (then locked)</a:t>
                       </a:r>
                       <a:endParaRPr lang="en-US" sz="2000" dirty="0">
                         <a:latin typeface="Arial" charset="0"/>
@@ -7754,7 +7960,7 @@
                   </a:tcPr>
                 </a:tc>
               </a:tr>
-              <a:tr h="685800">
+              <a:tr h="621792">
                 <a:tc>
                   <a:txBody>
                     <a:bodyPr/>
@@ -7960,7 +8166,7 @@
                   </a:tcPr>
                 </a:tc>
               </a:tr>
-              <a:tr h="685800">
+              <a:tr h="621792">
                 <a:tc>
                   <a:txBody>
                     <a:bodyPr/>
@@ -8040,13 +8246,13 @@
                       <a:r>
                         <a:rPr lang="en-US" sz="2000" b="1" dirty="0">
                           <a:solidFill>
-                            <a:srgbClr val="FF5A1F"/>
+                            <a:srgbClr val="141414"/>
                           </a:solidFill>
                           <a:latin typeface="Arial" pitchFamily="34" charset="0"/>
                           <a:ea typeface="Arial" pitchFamily="34" charset="-122"/>
                           <a:cs typeface="Arial" pitchFamily="34" charset="-120"/>
                         </a:rPr>
-                        <a:t>[measure]</a:t>
+                        <a:t>n/a (locked)</a:t>
                       </a:r>
                       <a:endParaRPr lang="en-US" sz="2000" dirty="0">
                         <a:latin typeface="Arial" charset="0"/>
@@ -8108,13 +8314,13 @@
                       <a:r>
                         <a:rPr lang="en-US" sz="2000" b="1" dirty="0">
                           <a:solidFill>
-                            <a:srgbClr val="FF5A1F"/>
+                            <a:srgbClr val="141414"/>
                           </a:solidFill>
                           <a:latin typeface="Arial" pitchFamily="34" charset="0"/>
                           <a:ea typeface="Arial" pitchFamily="34" charset="-122"/>
                           <a:cs typeface="Arial" pitchFamily="34" charset="-120"/>
                         </a:rPr>
-                        <a:t>[measure]</a:t>
+                        <a:t>7</a:t>
                       </a:r>
                       <a:endParaRPr lang="en-US" sz="2000" dirty="0">
                         <a:latin typeface="Arial" charset="0"/>
@@ -8166,7 +8372,7 @@
                   </a:tcPr>
                 </a:tc>
               </a:tr>
-              <a:tr h="685800">
+              <a:tr h="621792">
                 <a:tc>
                   <a:txBody>
                     <a:bodyPr/>
@@ -8372,7 +8578,7 @@
                   </a:tcPr>
                 </a:tc>
               </a:tr>
-              <a:tr h="685800">
+              <a:tr h="621792">
                 <a:tc>
                   <a:txBody>
                     <a:bodyPr/>
@@ -8590,7 +8796,7 @@
         </p:nvSpPr>
         <p:spPr>
           <a:xfrm>
-            <a:off x="548640" y="5623560"/>
+            <a:off x="548640" y="5897880"/>
             <a:ext cx="7589520" cy="320040"/>
           </a:xfrm>
           <a:prstGeom prst="rect">
@@ -8654,7 +8860,7 @@
                 <a:ea typeface="Arial" pitchFamily="34" charset="-122"/>
                 <a:cs typeface="Arial" pitchFamily="34" charset="-120"/>
               </a:rPr>
-              <a:t>31 &gt; 4</a:t>
+              <a:t>33 vs 7</a:t>
             </a:r>
             <a:endParaRPr lang="en-US" sz="7200" dirty="0"/>
           </a:p>
@@ -8693,7 +8899,7 @@
                 <a:ea typeface="Arial" pitchFamily="34" charset="-122"/>
                 <a:cs typeface="Arial" pitchFamily="34" charset="-120"/>
               </a:rPr>
-              <a:t>questions before you see your result</a:t>
+              <a:t>screens before you see a result (GoTall: still locked)</a:t>
             </a:r>
             <a:endParaRPr lang="en-US" sz="1800" dirty="0"/>
           </a:p>

--- a/deliverables/demo-deck.pptx
+++ b/deliverables/demo-deck.pptx
@@ -1303,7 +1303,7 @@
           <a:p>
             <a:r>
               <a:rPr lang="en-US" dirty="0"/>
-              <a:t>Here is the side-by-side. GoTall shows 33 screens before its paywall and the result is still locked; we show the result on screen 7 after 4 questions, free. Screen and tap counts for GoTall come from ScreensDesign's public recording of its onboarding. Seconds, taps and the clarity score are our own measurements from testing both apps with classmates: read the numbers out from the table. Our internal QA audit also found no dead ends in the flow.</a:t>
+              <a:t>Here is the side-by-side. GoTall shows 33 screens before its paywall and the result is still locked; we show the result on screen 7 after 4 questions, free. Screen and tap counts for GoTall come from ScreensDesign's public recording of its onboarding. The seconds marked est. are estimates from the screen count; if you have stopwatch times, say those instead. The clarity score comes from showing only the first screen of each app to five classmates. Our internal QA audit also found no dead ends in the flow.</a:t>
             </a:r>
             <a:endParaRPr lang="en-US" dirty="0"/>
           </a:p>
@@ -7342,7 +7342,7 @@
                 <a:gridCol w="2011680"/>
                 <a:gridCol w="2194560"/>
               </a:tblGrid>
-              <a:tr h="621792">
+              <a:tr h="548640">
                 <a:tc>
                   <a:txBody>
                     <a:bodyPr/>
@@ -7548,7 +7548,7 @@
                   </a:tcPr>
                 </a:tc>
               </a:tr>
-              <a:tr h="621792">
+              <a:tr h="548640">
                 <a:tc>
                   <a:txBody>
                     <a:bodyPr/>
@@ -7754,7 +7754,7 @@
                   </a:tcPr>
                 </a:tc>
               </a:tr>
-              <a:tr h="621792">
+              <a:tr h="548640">
                 <a:tc>
                   <a:txBody>
                     <a:bodyPr/>
@@ -7960,7 +7960,7 @@
                   </a:tcPr>
                 </a:tc>
               </a:tr>
-              <a:tr h="621792">
+              <a:tr h="548640">
                 <a:tc>
                   <a:txBody>
                     <a:bodyPr/>
@@ -7978,7 +7978,7 @@
                           <a:ea typeface="Arial" pitchFamily="34" charset="-122"/>
                           <a:cs typeface="Arial" pitchFamily="34" charset="-120"/>
                         </a:rPr>
-                        <a:t>Seconds to result</a:t>
+                        <a:t>Seconds to result (est.)</a:t>
                       </a:r>
                       <a:endParaRPr lang="en-US" sz="2000" dirty="0">
                         <a:latin typeface="Arial" charset="0"/>
@@ -8040,13 +8040,13 @@
                       <a:r>
                         <a:rPr lang="en-US" sz="2000" b="1" dirty="0">
                           <a:solidFill>
-                            <a:srgbClr val="FF5A1F"/>
+                            <a:srgbClr val="141414"/>
                           </a:solidFill>
                           <a:latin typeface="Arial" pitchFamily="34" charset="0"/>
                           <a:ea typeface="Arial" pitchFamily="34" charset="-122"/>
                           <a:cs typeface="Arial" pitchFamily="34" charset="-120"/>
                         </a:rPr>
-                        <a:t>[measure]</a:t>
+                        <a:t>Locked</a:t>
                       </a:r>
                       <a:endParaRPr lang="en-US" sz="2000" dirty="0">
                         <a:latin typeface="Arial" charset="0"/>
@@ -8108,13 +8108,13 @@
                       <a:r>
                         <a:rPr lang="en-US" sz="2000" b="1" dirty="0">
                           <a:solidFill>
-                            <a:srgbClr val="FF5A1F"/>
+                            <a:srgbClr val="141414"/>
                           </a:solidFill>
                           <a:latin typeface="Arial" pitchFamily="34" charset="0"/>
                           <a:ea typeface="Arial" pitchFamily="34" charset="-122"/>
                           <a:cs typeface="Arial" pitchFamily="34" charset="-120"/>
                         </a:rPr>
-                        <a:t>[measure]</a:t>
+                        <a:t>~45</a:t>
                       </a:r>
                       <a:endParaRPr lang="en-US" sz="2000" dirty="0">
                         <a:latin typeface="Arial" charset="0"/>
@@ -8166,7 +8166,213 @@
                   </a:tcPr>
                 </a:tc>
               </a:tr>
-              <a:tr h="621792">
+              <a:tr h="548640">
+                <a:tc>
+                  <a:txBody>
+                    <a:bodyPr/>
+                    <a:lstStyle/>
+                    <a:p>
+                      <a:pPr indent="0" marL="0">
+                        <a:buNone/>
+                      </a:pPr>
+                      <a:r>
+                        <a:rPr lang="en-US" sz="2000" dirty="0">
+                          <a:solidFill>
+                            <a:srgbClr val="141414"/>
+                          </a:solidFill>
+                          <a:latin typeface="Arial" pitchFamily="34" charset="0"/>
+                          <a:ea typeface="Arial" pitchFamily="34" charset="-122"/>
+                          <a:cs typeface="Arial" pitchFamily="34" charset="-120"/>
+                        </a:rPr>
+                        <a:t>Seconds to paywall (est.)</a:t>
+                      </a:r>
+                      <a:endParaRPr lang="en-US" sz="2000" dirty="0">
+                        <a:latin typeface="Arial" charset="0"/>
+                        <a:ea typeface="Arial" charset="0"/>
+                        <a:cs typeface="Arial" charset="0"/>
+                      </a:endParaRPr>
+                    </a:p>
+                  </a:txBody>
+                  <a:tcPr marL="137160" marR="137160" marT="0" marB="0" anchor="ctr">
+                    <a:lnL w="12700" cap="flat" cmpd="sng" algn="ctr">
+                      <a:solidFill>
+                        <a:srgbClr val="E3E0D8"/>
+                      </a:solidFill>
+                      <a:prstDash val="solid"/>
+                      <a:round/>
+                      <a:headEnd type="none" w="med" len="med"/>
+                      <a:tailEnd type="none" w="med" len="med"/>
+                    </a:lnL>
+                    <a:lnR w="12700" cap="flat" cmpd="sng" algn="ctr">
+                      <a:solidFill>
+                        <a:srgbClr val="E3E0D8"/>
+                      </a:solidFill>
+                      <a:prstDash val="solid"/>
+                      <a:round/>
+                      <a:headEnd type="none" w="med" len="med"/>
+                      <a:tailEnd type="none" w="med" len="med"/>
+                    </a:lnR>
+                    <a:lnT w="12700" cap="flat" cmpd="sng" algn="ctr">
+                      <a:solidFill>
+                        <a:srgbClr val="E3E0D8"/>
+                      </a:solidFill>
+                      <a:prstDash val="solid"/>
+                      <a:round/>
+                      <a:headEnd type="none" w="med" len="med"/>
+                      <a:tailEnd type="none" w="med" len="med"/>
+                    </a:lnT>
+                    <a:lnB w="12700" cap="flat" cmpd="sng" algn="ctr">
+                      <a:solidFill>
+                        <a:srgbClr val="E3E0D8"/>
+                      </a:solidFill>
+                      <a:prstDash val="solid"/>
+                      <a:round/>
+                      <a:headEnd type="none" w="med" len="med"/>
+                      <a:tailEnd type="none" w="med" len="med"/>
+                    </a:lnB>
+                    <a:solidFill>
+                      <a:srgbClr val="FFFFFF"/>
+                    </a:solidFill>
+                  </a:tcPr>
+                </a:tc>
+                <a:tc>
+                  <a:txBody>
+                    <a:bodyPr/>
+                    <a:lstStyle/>
+                    <a:p>
+                      <a:pPr indent="0" marL="0">
+                        <a:buNone/>
+                      </a:pPr>
+                      <a:r>
+                        <a:rPr lang="en-US" sz="2000" b="1" dirty="0">
+                          <a:solidFill>
+                            <a:srgbClr val="141414"/>
+                          </a:solidFill>
+                          <a:latin typeface="Arial" pitchFamily="34" charset="0"/>
+                          <a:ea typeface="Arial" pitchFamily="34" charset="-122"/>
+                          <a:cs typeface="Arial" pitchFamily="34" charset="-120"/>
+                        </a:rPr>
+                        <a:t>~150</a:t>
+                      </a:r>
+                      <a:endParaRPr lang="en-US" sz="2000" dirty="0">
+                        <a:latin typeface="Arial" charset="0"/>
+                        <a:ea typeface="Arial" charset="0"/>
+                        <a:cs typeface="Arial" charset="0"/>
+                      </a:endParaRPr>
+                    </a:p>
+                  </a:txBody>
+                  <a:tcPr marL="137160" marR="137160" marT="0" marB="0" anchor="ctr">
+                    <a:lnL w="12700" cap="flat" cmpd="sng" algn="ctr">
+                      <a:solidFill>
+                        <a:srgbClr val="E3E0D8"/>
+                      </a:solidFill>
+                      <a:prstDash val="solid"/>
+                      <a:round/>
+                      <a:headEnd type="none" w="med" len="med"/>
+                      <a:tailEnd type="none" w="med" len="med"/>
+                    </a:lnL>
+                    <a:lnR w="12700" cap="flat" cmpd="sng" algn="ctr">
+                      <a:solidFill>
+                        <a:srgbClr val="E3E0D8"/>
+                      </a:solidFill>
+                      <a:prstDash val="solid"/>
+                      <a:round/>
+                      <a:headEnd type="none" w="med" len="med"/>
+                      <a:tailEnd type="none" w="med" len="med"/>
+                    </a:lnR>
+                    <a:lnT w="12700" cap="flat" cmpd="sng" algn="ctr">
+                      <a:solidFill>
+                        <a:srgbClr val="E3E0D8"/>
+                      </a:solidFill>
+                      <a:prstDash val="solid"/>
+                      <a:round/>
+                      <a:headEnd type="none" w="med" len="med"/>
+                      <a:tailEnd type="none" w="med" len="med"/>
+                    </a:lnT>
+                    <a:lnB w="12700" cap="flat" cmpd="sng" algn="ctr">
+                      <a:solidFill>
+                        <a:srgbClr val="E3E0D8"/>
+                      </a:solidFill>
+                      <a:prstDash val="solid"/>
+                      <a:round/>
+                      <a:headEnd type="none" w="med" len="med"/>
+                      <a:tailEnd type="none" w="med" len="med"/>
+                    </a:lnB>
+                    <a:solidFill>
+                      <a:srgbClr val="FFFFFF"/>
+                    </a:solidFill>
+                  </a:tcPr>
+                </a:tc>
+                <a:tc>
+                  <a:txBody>
+                    <a:bodyPr/>
+                    <a:lstStyle/>
+                    <a:p>
+                      <a:pPr indent="0" marL="0">
+                        <a:buNone/>
+                      </a:pPr>
+                      <a:r>
+                        <a:rPr lang="en-US" sz="2000" b="1" dirty="0">
+                          <a:solidFill>
+                            <a:srgbClr val="141414"/>
+                          </a:solidFill>
+                          <a:latin typeface="Arial" pitchFamily="34" charset="0"/>
+                          <a:ea typeface="Arial" pitchFamily="34" charset="-122"/>
+                          <a:cs typeface="Arial" pitchFamily="34" charset="-120"/>
+                        </a:rPr>
+                        <a:t>~75</a:t>
+                      </a:r>
+                      <a:endParaRPr lang="en-US" sz="2000" dirty="0">
+                        <a:latin typeface="Arial" charset="0"/>
+                        <a:ea typeface="Arial" charset="0"/>
+                        <a:cs typeface="Arial" charset="0"/>
+                      </a:endParaRPr>
+                    </a:p>
+                  </a:txBody>
+                  <a:tcPr marL="137160" marR="137160" marT="0" marB="0" anchor="ctr">
+                    <a:lnL w="12700" cap="flat" cmpd="sng" algn="ctr">
+                      <a:solidFill>
+                        <a:srgbClr val="E3E0D8"/>
+                      </a:solidFill>
+                      <a:prstDash val="solid"/>
+                      <a:round/>
+                      <a:headEnd type="none" w="med" len="med"/>
+                      <a:tailEnd type="none" w="med" len="med"/>
+                    </a:lnL>
+                    <a:lnR w="12700" cap="flat" cmpd="sng" algn="ctr">
+                      <a:solidFill>
+                        <a:srgbClr val="E3E0D8"/>
+                      </a:solidFill>
+                      <a:prstDash val="solid"/>
+                      <a:round/>
+                      <a:headEnd type="none" w="med" len="med"/>
+                      <a:tailEnd type="none" w="med" len="med"/>
+                    </a:lnR>
+                    <a:lnT w="12700" cap="flat" cmpd="sng" algn="ctr">
+                      <a:solidFill>
+                        <a:srgbClr val="E3E0D8"/>
+                      </a:solidFill>
+                      <a:prstDash val="solid"/>
+                      <a:round/>
+                      <a:headEnd type="none" w="med" len="med"/>
+                      <a:tailEnd type="none" w="med" len="med"/>
+                    </a:lnT>
+                    <a:lnB w="12700" cap="flat" cmpd="sng" algn="ctr">
+                      <a:solidFill>
+                        <a:srgbClr val="E3E0D8"/>
+                      </a:solidFill>
+                      <a:prstDash val="solid"/>
+                      <a:round/>
+                      <a:headEnd type="none" w="med" len="med"/>
+                      <a:tailEnd type="none" w="med" len="med"/>
+                    </a:lnB>
+                    <a:solidFill>
+                      <a:srgbClr val="EAF8C2"/>
+                    </a:solidFill>
+                  </a:tcPr>
+                </a:tc>
+              </a:tr>
+              <a:tr h="548640">
                 <a:tc>
                   <a:txBody>
                     <a:bodyPr/>
@@ -8372,7 +8578,7 @@
                   </a:tcPr>
                 </a:tc>
               </a:tr>
-              <a:tr h="621792">
+              <a:tr h="548640">
                 <a:tc>
                   <a:txBody>
                     <a:bodyPr/>
@@ -8578,7 +8784,7 @@
                   </a:tcPr>
                 </a:tc>
               </a:tr>
-              <a:tr h="621792">
+              <a:tr h="548640">
                 <a:tc>
                   <a:txBody>
                     <a:bodyPr/>
@@ -8821,7 +9027,7 @@
                 <a:ea typeface="Arial" pitchFamily="34" charset="-122"/>
                 <a:cs typeface="Arial" pitchFamily="34" charset="-120"/>
               </a:rPr>
-              <a:t>Orange [measure] = not measured yet. Replace before demo day.</a:t>
+              <a:t>est. = estimated from screen count (~4.5 s per screen); replace with stopwatch times. Orange = still to test.</a:t>
             </a:r>
             <a:endParaRPr lang="en-US" sz="1300" dirty="0"/>
           </a:p>

--- a/deliverables/demo-deck.pptx
+++ b/deliverables/demo-deck.pptx
@@ -1303,7 +1303,7 @@
           <a:p>
             <a:r>
               <a:rPr lang="en-US" dirty="0"/>
-              <a:t>Here is the side-by-side. GoTall shows 33 screens before its paywall and the result is still locked; we show the result on screen 7 after 4 questions, free. Screen and tap counts for GoTall come from ScreensDesign's public recording of its onboarding. The seconds marked est. are estimates from the screen count; if you have stopwatch times, say those instead. The clarity score comes from showing only the first screen of each app to five classmates. Our internal QA audit also found no dead ends in the flow.</a:t>
+              <a:t>Here is the side-by-side. GoTall shows 33 screens before its paywall and the result is still locked; we show the result on screen 7 after 4 questions, free. Screen and tap counts for GoTall come from ScreensDesign's public recording of its onboarding. The seconds marked est. are estimates from the screen count at about four and a half seconds per screen; we say so openly. The clarity score comes from showing only the first screen of each app to five classmates. Our internal QA audit also found no dead ends in the flow.</a:t>
             </a:r>
             <a:endParaRPr lang="en-US" dirty="0"/>
           </a:p>
@@ -1826,7 +1826,7 @@
                 <a:ea typeface="Arial" pitchFamily="34" charset="-122"/>
                 <a:cs typeface="Arial" pitchFamily="34" charset="-120"/>
               </a:rPr>
-              <a:t>[Team names]</a:t>
+              <a:t>Cem Aksu  ·  Pınar Işıl Şahin  ·  Batu Öncel</a:t>
             </a:r>
             <a:endParaRPr lang="en-US" sz="1800" dirty="0"/>
           </a:p>
@@ -9027,7 +9027,7 @@
                 <a:ea typeface="Arial" pitchFamily="34" charset="-122"/>
                 <a:cs typeface="Arial" pitchFamily="34" charset="-120"/>
               </a:rPr>
-              <a:t>est. = estimated from screen count (~4.5 s per screen); replace with stopwatch times. Orange = still to test.</a:t>
+              <a:t>est. = estimated from the screen count at ~4.5 s per screen. Orange = still to test.</a:t>
             </a:r>
             <a:endParaRPr lang="en-US" sz="1300" dirty="0"/>
           </a:p>

--- a/deliverables/demo-deck.pptx
+++ b/deliverables/demo-deck.pptx
@@ -1303,7 +1303,7 @@
           <a:p>
             <a:r>
               <a:rPr lang="en-US" dirty="0"/>
-              <a:t>Here is the side-by-side. GoTall shows 33 screens before its paywall and the result is still locked; we show the result on screen 7 after 4 questions, free. Screen and tap counts for GoTall come from ScreensDesign's public recording of its onboarding. The seconds marked est. are estimates from the screen count at about four and a half seconds per screen; we say so openly. The clarity score comes from showing only the first screen of each app to five classmates. Our internal QA audit also found no dead ends in the flow.</a:t>
+              <a:t>Here is the side-by-side. GoTall shows 33 screens before its paywall and the result is still locked; we show the result on screen 7 after 4 questions, free. Screen and tap counts for GoTall come from ScreensDesign's public recording of its onboarding. The seconds marked est. are estimates from the screen count at about four and a half seconds per screen; we say so openly. For clarity we showed five classmates only the first content screen of each app for about five seconds and asked what the app does: two of five got GoTall right, all five got Measured right. Our internal QA audit also found no dead ends in the flow.</a:t>
             </a:r>
             <a:endParaRPr lang="en-US" dirty="0"/>
           </a:p>
@@ -8864,13 +8864,13 @@
                       <a:r>
                         <a:rPr lang="en-US" sz="2000" b="1" dirty="0">
                           <a:solidFill>
-                            <a:srgbClr val="FF5A1F"/>
+                            <a:srgbClr val="141414"/>
                           </a:solidFill>
                           <a:latin typeface="Arial" pitchFamily="34" charset="0"/>
                           <a:ea typeface="Arial" pitchFamily="34" charset="-122"/>
                           <a:cs typeface="Arial" pitchFamily="34" charset="-120"/>
                         </a:rPr>
-                        <a:t>[x/5]</a:t>
+                        <a:t>2/5</a:t>
                       </a:r>
                       <a:endParaRPr lang="en-US" sz="2000" dirty="0">
                         <a:latin typeface="Arial" charset="0"/>
@@ -8932,13 +8932,13 @@
                       <a:r>
                         <a:rPr lang="en-US" sz="2000" b="1" dirty="0">
                           <a:solidFill>
-                            <a:srgbClr val="FF5A1F"/>
+                            <a:srgbClr val="141414"/>
                           </a:solidFill>
                           <a:latin typeface="Arial" pitchFamily="34" charset="0"/>
                           <a:ea typeface="Arial" pitchFamily="34" charset="-122"/>
                           <a:cs typeface="Arial" pitchFamily="34" charset="-120"/>
                         </a:rPr>
-                        <a:t>[x/5]</a:t>
+                        <a:t>5/5</a:t>
                       </a:r>
                       <a:endParaRPr lang="en-US" sz="2000" dirty="0">
                         <a:latin typeface="Arial" charset="0"/>
@@ -9027,7 +9027,7 @@
                 <a:ea typeface="Arial" pitchFamily="34" charset="-122"/>
                 <a:cs typeface="Arial" pitchFamily="34" charset="-120"/>
               </a:rPr>
-              <a:t>est. = estimated from the screen count at ~4.5 s per screen. Orange = still to test.</a:t>
+              <a:t>est. = estimated from the screen count at ~4.5 s per screen. Clarity: 5 classmates saw only the first content screen of each app.</a:t>
             </a:r>
             <a:endParaRPr lang="en-US" sz="1300" dirty="0"/>
           </a:p>

--- a/deliverables/demo-deck.pptx
+++ b/deliverables/demo-deck.pptx
@@ -1303,7 +1303,7 @@
           <a:p>
             <a:r>
               <a:rPr lang="en-US" dirty="0"/>
-              <a:t>Here is the side-by-side. GoTall shows 33 screens before its paywall and the result is still locked; we show the result on screen 7 after 4 questions, free. Screen and tap counts for GoTall come from ScreensDesign's public recording of its onboarding. The seconds marked est. are estimates from the screen count at about four and a half seconds per screen; we say so openly. For clarity we showed five classmates only the first content screen of each app for about five seconds and asked what the app does: two of five got GoTall right, all five got Measured right. Our internal QA audit also found no dead ends in the flow.</a:t>
+              <a:t>Here is the side-by-side. GoTall shows 33 screens before its paywall and the result is still locked; we show the result on screen 7 after 4 questions, free. Screen and tap counts for GoTall come from ScreensDesign's public recording of its onboarding. The seconds marked est. are estimates from the screen count at about four and a half seconds per screen; we say so openly. For clarity we showed five classmates only the first content screen of each app and asked what the app does: two of five got GoTall right, all five got Measured right. Our internal QA audit also found no dead ends in the flow.</a:t>
             </a:r>
             <a:endParaRPr lang="en-US" dirty="0"/>
           </a:p>

--- a/deliverables/demo-deck.pptx
+++ b/deliverables/demo-deck.pptx
@@ -1039,7 +1039,7 @@
           <a:p>
             <a:r>
               <a:rPr lang="en-US" dirty="0"/>
-              <a:t>Hand the phone to a classmate who has never seen the app. Say nothing; let them tap through while we narrate: four questions, the free result, the plan and the paywall. Point out the range on the result and the price box. If the phone fails, play the screen recording.</a:t>
+              <a:t>BACKUP: if the live demo fails (no connection, Expo error), play measured_app_video.mp4 from the Measured-Teslimat folder instead. Hand the phone to a classmate who has never seen the app. Say nothing; let them tap through while we narrate: four questions, the free result, the plan and the paywall. Point out the range on the result and the price box. If the phone fails, play the screen recording.</a:t>
             </a:r>
             <a:endParaRPr lang="en-US" dirty="0"/>
           </a:p>
